--- a/房屋租赁系统答辩_20260610_164215.pptx
+++ b/房屋租赁系统答辩_20260610_164215.pptx
@@ -7192,816 +7192,6 @@
       </p:grpSp>
       <p:grpSp>
         <p:nvGrpSpPr>
-          <p:cNvPr id="34" name="Group 34"/>
-          <p:cNvGrpSpPr/>
-          <p:nvPr/>
-        </p:nvGrpSpPr>
-        <p:grpSpPr>
-          <a:xfrm>
-            <a:off x="747712" y="1288256"/>
-            <a:ext cx="10682288" cy="4760119"/>
-            <a:chOff x="747712" y="1288256"/>
-            <a:chExt cx="10682288" cy="4760119"/>
-          </a:xfrm>
-        </p:grpSpPr>
-        <p:grpSp>
-          <p:nvGrpSpPr>
-            <p:cNvPr id="10" name="Group 10"/>
-            <p:cNvGrpSpPr/>
-            <p:nvPr/>
-          </p:nvGrpSpPr>
-          <p:grpSpPr>
-            <a:xfrm>
-              <a:off x="747712" y="1288256"/>
-              <a:ext cx="10682288" cy="2140744"/>
-              <a:chOff x="747712" y="1288256"/>
-              <a:chExt cx="10682288" cy="2140744"/>
-            </a:xfrm>
-          </p:grpSpPr>
-          <p:sp>
-            <p:nvSpPr>
-              <p:cNvPr id="7" name="TextBox 7"/>
-              <p:cNvSpPr txBox="1"/>
-              <p:nvPr/>
-            </p:nvSpPr>
-            <p:spPr>
-              <a:xfrm>
-                <a:off x="747712" y="1288256"/>
-                <a:ext cx="1532888" cy="228600"/>
-              </a:xfrm>
-              <a:prstGeom prst="rect">
-                <a:avLst/>
-              </a:prstGeom>
-              <a:noFill/>
-              <a:ln>
-                <a:noFill/>
-              </a:ln>
-            </p:spPr>
-            <p:txBody>
-              <a:bodyPr wrap="none" lIns="0" tIns="0" rIns="0" bIns="0" anchor="t" anchorCtr="0">
-                <a:spAutoFit/>
-              </a:bodyPr>
-              <a:lstStyle/>
-              <a:p>
-                <a:pPr algn="l"/>
-                <a:r>
-                  <a:rPr lang="zh-CN" sz="1125" b="1" dirty="0">
-                    <a:solidFill>
-                      <a:srgbClr val="00897B"/>
-                    </a:solidFill>
-                    <a:latin typeface="Arial" panose="020B0604020202020204"/>
-                    <a:ea typeface="微软雅黑" panose="020B0503020204020204" charset="-122"/>
-                    <a:cs typeface="Arial" panose="020B0604020202020204"/>
-                  </a:rPr>
-                  <a:t>ER 图 — 核心数据关系</a:t>
-                </a:r>
-                <a:endParaRPr lang="zh-CN" sz="1125" b="1" dirty="0">
-                  <a:solidFill>
-                    <a:srgbClr val="00897B"/>
-                  </a:solidFill>
-                  <a:latin typeface="Arial" panose="020B0604020202020204"/>
-                  <a:ea typeface="微软雅黑" panose="020B0503020204020204" charset="-122"/>
-                  <a:cs typeface="Arial" panose="020B0604020202020204"/>
-                </a:endParaRPr>
-              </a:p>
-            </p:txBody>
-          </p:sp>
-          <p:sp>
-            <p:nvSpPr>
-              <p:cNvPr id="8" name="Rectangle 8"/>
-              <p:cNvSpPr/>
-              <p:nvPr/>
-            </p:nvSpPr>
-            <p:spPr>
-              <a:xfrm>
-                <a:off x="762000" y="1524000"/>
-                <a:ext cx="10668000" cy="1905000"/>
-              </a:xfrm>
-              <a:prstGeom prst="roundRect">
-                <a:avLst>
-                  <a:gd name="adj" fmla="val 5000"/>
-                </a:avLst>
-              </a:prstGeom>
-              <a:solidFill>
-                <a:srgbClr val="F0F7F4"/>
-              </a:solidFill>
-              <a:ln>
-                <a:noFill/>
-              </a:ln>
-            </p:spPr>
-          </p:sp>
-          <p:pic>
-            <p:nvPicPr>
-              <p:cNvPr id="9" name="Image 9"/>
-              <p:cNvPicPr>
-                <a:picLocks noChangeAspect="1"/>
-              </p:cNvPicPr>
-              <p:nvPr/>
-            </p:nvPicPr>
-            <p:blipFill>
-              <a:blip r:embed="rId1"/>
-              <a:stretch>
-                <a:fillRect/>
-              </a:stretch>
-            </p:blipFill>
-            <p:spPr>
-              <a:xfrm>
-                <a:off x="4573141" y="1638300"/>
-                <a:ext cx="3045719" cy="1676400"/>
-              </a:xfrm>
-              <a:prstGeom prst="rect">
-                <a:avLst/>
-              </a:prstGeom>
-            </p:spPr>
-          </p:pic>
-        </p:grpSp>
-        <p:grpSp>
-          <p:nvGrpSpPr>
-            <p:cNvPr id="24" name="Group 24"/>
-            <p:cNvGrpSpPr/>
-            <p:nvPr/>
-          </p:nvGrpSpPr>
-          <p:grpSpPr>
-            <a:xfrm>
-              <a:off x="747712" y="3526631"/>
-              <a:ext cx="10110788" cy="854869"/>
-              <a:chOff x="747712" y="3526631"/>
-              <a:chExt cx="10110788" cy="854869"/>
-            </a:xfrm>
-          </p:grpSpPr>
-          <p:sp>
-            <p:nvSpPr>
-              <p:cNvPr id="11" name="TextBox 11"/>
-              <p:cNvSpPr txBox="1"/>
-              <p:nvPr/>
-            </p:nvSpPr>
-            <p:spPr>
-              <a:xfrm>
-                <a:off x="747712" y="3526631"/>
-                <a:ext cx="816173" cy="228600"/>
-              </a:xfrm>
-              <a:prstGeom prst="rect">
-                <a:avLst/>
-              </a:prstGeom>
-              <a:noFill/>
-              <a:ln>
-                <a:noFill/>
-              </a:ln>
-            </p:spPr>
-            <p:txBody>
-              <a:bodyPr wrap="none" lIns="0" tIns="0" rIns="0" bIns="0" anchor="t" anchorCtr="0">
-                <a:spAutoFit/>
-              </a:bodyPr>
-              <a:lstStyle/>
-              <a:p>
-                <a:pPr algn="l"/>
-                <a:r>
-                  <a:rPr lang="zh-CN" sz="1125" b="1" dirty="0">
-                    <a:solidFill>
-                      <a:srgbClr val="00897B"/>
-                    </a:solidFill>
-                    <a:latin typeface="Arial" panose="020B0604020202020204"/>
-                    <a:ea typeface="微软雅黑" panose="020B0503020204020204" charset="-122"/>
-                    <a:cs typeface="Arial" panose="020B0604020202020204"/>
-                  </a:rPr>
-                  <a:t>核心表结构</a:t>
-                </a:r>
-                <a:endParaRPr lang="zh-CN" sz="1125" b="1" dirty="0">
-                  <a:solidFill>
-                    <a:srgbClr val="00897B"/>
-                  </a:solidFill>
-                  <a:latin typeface="Arial" panose="020B0604020202020204"/>
-                  <a:ea typeface="微软雅黑" panose="020B0503020204020204" charset="-122"/>
-                  <a:cs typeface="Arial" panose="020B0604020202020204"/>
-                </a:endParaRPr>
-              </a:p>
-            </p:txBody>
-          </p:sp>
-          <p:sp>
-            <p:nvSpPr>
-              <p:cNvPr id="12" name="Rectangle 12"/>
-              <p:cNvSpPr/>
-              <p:nvPr/>
-            </p:nvSpPr>
-            <p:spPr>
-              <a:xfrm>
-                <a:off x="762000" y="3810000"/>
-                <a:ext cx="1524000" cy="571500"/>
-              </a:xfrm>
-              <a:prstGeom prst="roundRect">
-                <a:avLst>
-                  <a:gd name="adj" fmla="val 13333"/>
-                </a:avLst>
-              </a:prstGeom>
-              <a:solidFill>
-                <a:srgbClr val="00897B"/>
-              </a:solidFill>
-              <a:ln>
-                <a:noFill/>
-              </a:ln>
-            </p:spPr>
-          </p:sp>
-          <p:sp>
-            <p:nvSpPr>
-              <p:cNvPr id="13" name="TextBox 13"/>
-              <p:cNvSpPr txBox="1"/>
-              <p:nvPr/>
-            </p:nvSpPr>
-            <p:spPr>
-              <a:xfrm>
-                <a:off x="1188079" y="4046220"/>
-                <a:ext cx="671841" cy="182880"/>
-              </a:xfrm>
-              <a:prstGeom prst="rect">
-                <a:avLst/>
-              </a:prstGeom>
-              <a:noFill/>
-              <a:ln>
-                <a:noFill/>
-              </a:ln>
-            </p:spPr>
-            <p:txBody>
-              <a:bodyPr wrap="none" lIns="0" tIns="0" rIns="0" bIns="0" anchor="t" anchorCtr="0">
-                <a:spAutoFit/>
-              </a:bodyPr>
-              <a:lstStyle/>
-              <a:p>
-                <a:pPr algn="ctr"/>
-                <a:r>
-                  <a:rPr lang="zh-CN" sz="900" b="1" dirty="0">
-                    <a:solidFill>
-                      <a:srgbClr val="FFFFFF"/>
-                    </a:solidFill>
-                    <a:latin typeface="Arial" panose="020B0604020202020204"/>
-                    <a:ea typeface="微软雅黑" panose="020B0503020204020204" charset="-122"/>
-                    <a:cs typeface="Arial" panose="020B0604020202020204"/>
-                  </a:rPr>
-                  <a:t>apartment</a:t>
-                </a:r>
-                <a:endParaRPr lang="zh-CN" sz="900" b="1" dirty="0">
-                  <a:solidFill>
-                    <a:srgbClr val="FFFFFF"/>
-                  </a:solidFill>
-                  <a:latin typeface="Arial" panose="020B0604020202020204"/>
-                  <a:ea typeface="微软雅黑" panose="020B0503020204020204" charset="-122"/>
-                  <a:cs typeface="Arial" panose="020B0604020202020204"/>
-                </a:endParaRPr>
-              </a:p>
-            </p:txBody>
-          </p:sp>
-          <p:sp>
-            <p:nvSpPr>
-              <p:cNvPr id="14" name="Rectangle 14"/>
-              <p:cNvSpPr/>
-              <p:nvPr/>
-            </p:nvSpPr>
-            <p:spPr>
-              <a:xfrm>
-                <a:off x="2476500" y="3810000"/>
-                <a:ext cx="1524000" cy="571500"/>
-              </a:xfrm>
-              <a:prstGeom prst="roundRect">
-                <a:avLst>
-                  <a:gd name="adj" fmla="val 13333"/>
-                </a:avLst>
-              </a:prstGeom>
-              <a:solidFill>
-                <a:srgbClr val="00897B"/>
-              </a:solidFill>
-              <a:ln>
-                <a:noFill/>
-              </a:ln>
-            </p:spPr>
-          </p:sp>
-          <p:sp>
-            <p:nvSpPr>
-              <p:cNvPr id="15" name="TextBox 15"/>
-              <p:cNvSpPr txBox="1"/>
-              <p:nvPr/>
-            </p:nvSpPr>
-            <p:spPr>
-              <a:xfrm>
-                <a:off x="3075851" y="4046220"/>
-                <a:ext cx="325298" cy="182880"/>
-              </a:xfrm>
-              <a:prstGeom prst="rect">
-                <a:avLst/>
-              </a:prstGeom>
-              <a:noFill/>
-              <a:ln>
-                <a:noFill/>
-              </a:ln>
-            </p:spPr>
-            <p:txBody>
-              <a:bodyPr wrap="none" lIns="0" tIns="0" rIns="0" bIns="0" anchor="t" anchorCtr="0">
-                <a:spAutoFit/>
-              </a:bodyPr>
-              <a:lstStyle/>
-              <a:p>
-                <a:pPr algn="ctr"/>
-                <a:r>
-                  <a:rPr lang="zh-CN" sz="900" b="1" dirty="0">
-                    <a:solidFill>
-                      <a:srgbClr val="FFFFFF"/>
-                    </a:solidFill>
-                    <a:latin typeface="Arial" panose="020B0604020202020204"/>
-                    <a:ea typeface="微软雅黑" panose="020B0503020204020204" charset="-122"/>
-                    <a:cs typeface="Arial" panose="020B0604020202020204"/>
-                  </a:rPr>
-                  <a:t>room</a:t>
-                </a:r>
-                <a:endParaRPr lang="zh-CN" sz="900" b="1" dirty="0">
-                  <a:solidFill>
-                    <a:srgbClr val="FFFFFF"/>
-                  </a:solidFill>
-                  <a:latin typeface="Arial" panose="020B0604020202020204"/>
-                  <a:ea typeface="微软雅黑" panose="020B0503020204020204" charset="-122"/>
-                  <a:cs typeface="Arial" panose="020B0604020202020204"/>
-                </a:endParaRPr>
-              </a:p>
-            </p:txBody>
-          </p:sp>
-          <p:sp>
-            <p:nvSpPr>
-              <p:cNvPr id="16" name="Rectangle 16"/>
-              <p:cNvSpPr/>
-              <p:nvPr/>
-            </p:nvSpPr>
-            <p:spPr>
-              <a:xfrm>
-                <a:off x="4191000" y="3810000"/>
-                <a:ext cx="1524000" cy="571500"/>
-              </a:xfrm>
-              <a:prstGeom prst="roundRect">
-                <a:avLst>
-                  <a:gd name="adj" fmla="val 13333"/>
-                </a:avLst>
-              </a:prstGeom>
-              <a:solidFill>
-                <a:srgbClr val="00897B"/>
-              </a:solidFill>
-              <a:ln>
-                <a:noFill/>
-              </a:ln>
-            </p:spPr>
-          </p:sp>
-          <p:sp>
-            <p:nvSpPr>
-              <p:cNvPr id="17" name="TextBox 17"/>
-              <p:cNvSpPr txBox="1"/>
-              <p:nvPr/>
-            </p:nvSpPr>
-            <p:spPr>
-              <a:xfrm>
-                <a:off x="4784050" y="4046220"/>
-                <a:ext cx="337899" cy="182880"/>
-              </a:xfrm>
-              <a:prstGeom prst="rect">
-                <a:avLst/>
-              </a:prstGeom>
-              <a:noFill/>
-              <a:ln>
-                <a:noFill/>
-              </a:ln>
-            </p:spPr>
-            <p:txBody>
-              <a:bodyPr wrap="none" lIns="0" tIns="0" rIns="0" bIns="0" anchor="t" anchorCtr="0">
-                <a:spAutoFit/>
-              </a:bodyPr>
-              <a:lstStyle/>
-              <a:p>
-                <a:pPr algn="ctr"/>
-                <a:r>
-                  <a:rPr lang="zh-CN" sz="900" b="1" dirty="0">
-                    <a:solidFill>
-                      <a:srgbClr val="FFFFFF"/>
-                    </a:solidFill>
-                    <a:latin typeface="Arial" panose="020B0604020202020204"/>
-                    <a:ea typeface="微软雅黑" panose="020B0503020204020204" charset="-122"/>
-                    <a:cs typeface="Arial" panose="020B0604020202020204"/>
-                  </a:rPr>
-                  <a:t>lease</a:t>
-                </a:r>
-                <a:endParaRPr lang="zh-CN" sz="900" b="1" dirty="0">
-                  <a:solidFill>
-                    <a:srgbClr val="FFFFFF"/>
-                  </a:solidFill>
-                  <a:latin typeface="Arial" panose="020B0604020202020204"/>
-                  <a:ea typeface="微软雅黑" panose="020B0503020204020204" charset="-122"/>
-                  <a:cs typeface="Arial" panose="020B0604020202020204"/>
-                </a:endParaRPr>
-              </a:p>
-            </p:txBody>
-          </p:sp>
-          <p:sp>
-            <p:nvSpPr>
-              <p:cNvPr id="18" name="Rectangle 18"/>
-              <p:cNvSpPr/>
-              <p:nvPr/>
-            </p:nvSpPr>
-            <p:spPr>
-              <a:xfrm>
-                <a:off x="5905500" y="3810000"/>
-                <a:ext cx="1524000" cy="571500"/>
-              </a:xfrm>
-              <a:prstGeom prst="roundRect">
-                <a:avLst>
-                  <a:gd name="adj" fmla="val 13333"/>
-                </a:avLst>
-              </a:prstGeom>
-              <a:solidFill>
-                <a:srgbClr val="4DB6AC"/>
-              </a:solidFill>
-              <a:ln>
-                <a:noFill/>
-              </a:ln>
-            </p:spPr>
-          </p:sp>
-          <p:sp>
-            <p:nvSpPr>
-              <p:cNvPr id="19" name="TextBox 19"/>
-              <p:cNvSpPr txBox="1"/>
-              <p:nvPr/>
-            </p:nvSpPr>
-            <p:spPr>
-              <a:xfrm>
-                <a:off x="6517453" y="4046220"/>
-                <a:ext cx="300095" cy="182880"/>
-              </a:xfrm>
-              <a:prstGeom prst="rect">
-                <a:avLst/>
-              </a:prstGeom>
-              <a:noFill/>
-              <a:ln>
-                <a:noFill/>
-              </a:ln>
-            </p:spPr>
-            <p:txBody>
-              <a:bodyPr wrap="none" lIns="0" tIns="0" rIns="0" bIns="0" anchor="t" anchorCtr="0">
-                <a:spAutoFit/>
-              </a:bodyPr>
-              <a:lstStyle/>
-              <a:p>
-                <a:pPr algn="ctr"/>
-                <a:r>
-                  <a:rPr lang="zh-CN" sz="900" b="1" dirty="0">
-                    <a:solidFill>
-                      <a:srgbClr val="FFFFFF"/>
-                    </a:solidFill>
-                    <a:latin typeface="Arial" panose="020B0604020202020204"/>
-                    <a:ea typeface="微软雅黑" panose="020B0503020204020204" charset="-122"/>
-                    <a:cs typeface="Arial" panose="020B0604020202020204"/>
-                  </a:rPr>
-                  <a:t>user</a:t>
-                </a:r>
-                <a:endParaRPr lang="zh-CN" sz="900" b="1" dirty="0">
-                  <a:solidFill>
-                    <a:srgbClr val="FFFFFF"/>
-                  </a:solidFill>
-                  <a:latin typeface="Arial" panose="020B0604020202020204"/>
-                  <a:ea typeface="微软雅黑" panose="020B0503020204020204" charset="-122"/>
-                  <a:cs typeface="Arial" panose="020B0604020202020204"/>
-                </a:endParaRPr>
-              </a:p>
-            </p:txBody>
-          </p:sp>
-          <p:sp>
-            <p:nvSpPr>
-              <p:cNvPr id="20" name="Rectangle 20"/>
-              <p:cNvSpPr/>
-              <p:nvPr/>
-            </p:nvSpPr>
-            <p:spPr>
-              <a:xfrm>
-                <a:off x="7620000" y="3810000"/>
-                <a:ext cx="1524000" cy="571500"/>
-              </a:xfrm>
-              <a:prstGeom prst="roundRect">
-                <a:avLst>
-                  <a:gd name="adj" fmla="val 13333"/>
-                </a:avLst>
-              </a:prstGeom>
-              <a:solidFill>
-                <a:srgbClr val="4DB6AC"/>
-              </a:solidFill>
-              <a:ln>
-                <a:noFill/>
-              </a:ln>
-            </p:spPr>
-          </p:sp>
-          <p:sp>
-            <p:nvSpPr>
-              <p:cNvPr id="21" name="TextBox 21"/>
-              <p:cNvSpPr txBox="1"/>
-              <p:nvPr/>
-            </p:nvSpPr>
-            <p:spPr>
-              <a:xfrm>
-                <a:off x="7992523" y="4046220"/>
-                <a:ext cx="778955" cy="182880"/>
-              </a:xfrm>
-              <a:prstGeom prst="rect">
-                <a:avLst/>
-              </a:prstGeom>
-              <a:noFill/>
-              <a:ln>
-                <a:noFill/>
-              </a:ln>
-            </p:spPr>
-            <p:txBody>
-              <a:bodyPr wrap="none" lIns="0" tIns="0" rIns="0" bIns="0" anchor="t" anchorCtr="0">
-                <a:spAutoFit/>
-              </a:bodyPr>
-              <a:lstStyle/>
-              <a:p>
-                <a:pPr algn="ctr"/>
-                <a:r>
-                  <a:rPr lang="zh-CN" sz="900" b="1" dirty="0">
-                    <a:solidFill>
-                      <a:srgbClr val="FFFFFF"/>
-                    </a:solidFill>
-                    <a:latin typeface="Arial" panose="020B0604020202020204"/>
-                    <a:ea typeface="微软雅黑" panose="020B0503020204020204" charset="-122"/>
-                    <a:cs typeface="Arial" panose="020B0604020202020204"/>
-                  </a:rPr>
-                  <a:t>appointment</a:t>
-                </a:r>
-                <a:endParaRPr lang="zh-CN" sz="900" b="1" dirty="0">
-                  <a:solidFill>
-                    <a:srgbClr val="FFFFFF"/>
-                  </a:solidFill>
-                  <a:latin typeface="Arial" panose="020B0604020202020204"/>
-                  <a:ea typeface="微软雅黑" panose="020B0503020204020204" charset="-122"/>
-                  <a:cs typeface="Arial" panose="020B0604020202020204"/>
-                </a:endParaRPr>
-              </a:p>
-            </p:txBody>
-          </p:sp>
-          <p:sp>
-            <p:nvSpPr>
-              <p:cNvPr id="22" name="Rectangle 22"/>
-              <p:cNvSpPr/>
-              <p:nvPr/>
-            </p:nvSpPr>
-            <p:spPr>
-              <a:xfrm>
-                <a:off x="9334500" y="3810000"/>
-                <a:ext cx="1524000" cy="571500"/>
-              </a:xfrm>
-              <a:prstGeom prst="roundRect">
-                <a:avLst>
-                  <a:gd name="adj" fmla="val 13333"/>
-                </a:avLst>
-              </a:prstGeom>
-              <a:solidFill>
-                <a:srgbClr val="4DB6AC"/>
-              </a:solidFill>
-              <a:ln>
-                <a:noFill/>
-              </a:ln>
-            </p:spPr>
-          </p:sp>
-          <p:sp>
-            <p:nvSpPr>
-              <p:cNvPr id="23" name="TextBox 23"/>
-              <p:cNvSpPr txBox="1"/>
-              <p:nvPr/>
-            </p:nvSpPr>
-            <p:spPr>
-              <a:xfrm>
-                <a:off x="9962205" y="4046220"/>
-                <a:ext cx="268591" cy="182880"/>
-              </a:xfrm>
-              <a:prstGeom prst="rect">
-                <a:avLst/>
-              </a:prstGeom>
-              <a:noFill/>
-              <a:ln>
-                <a:noFill/>
-              </a:ln>
-            </p:spPr>
-            <p:txBody>
-              <a:bodyPr wrap="none" lIns="0" tIns="0" rIns="0" bIns="0" anchor="t" anchorCtr="0">
-                <a:spAutoFit/>
-              </a:bodyPr>
-              <a:lstStyle/>
-              <a:p>
-                <a:pPr algn="ctr"/>
-                <a:r>
-                  <a:rPr lang="zh-CN" sz="900" b="1" dirty="0">
-                    <a:solidFill>
-                      <a:srgbClr val="FFFFFF"/>
-                    </a:solidFill>
-                    <a:latin typeface="Arial" panose="020B0604020202020204"/>
-                    <a:ea typeface="微软雅黑" panose="020B0503020204020204" charset="-122"/>
-                    <a:cs typeface="Arial" panose="020B0604020202020204"/>
-                  </a:rPr>
-                  <a:t>role</a:t>
-                </a:r>
-                <a:endParaRPr lang="zh-CN" sz="900" b="1" dirty="0">
-                  <a:solidFill>
-                    <a:srgbClr val="FFFFFF"/>
-                  </a:solidFill>
-                  <a:latin typeface="Arial" panose="020B0604020202020204"/>
-                  <a:ea typeface="微软雅黑" panose="020B0503020204020204" charset="-122"/>
-                  <a:cs typeface="Arial" panose="020B0604020202020204"/>
-                </a:endParaRPr>
-              </a:p>
-            </p:txBody>
-          </p:sp>
-        </p:grpSp>
-        <p:grpSp>
-          <p:nvGrpSpPr>
-            <p:cNvPr id="27" name="Group 27"/>
-            <p:cNvGrpSpPr/>
-            <p:nvPr/>
-          </p:nvGrpSpPr>
-          <p:grpSpPr>
-            <a:xfrm>
-              <a:off x="762000" y="4572000"/>
-              <a:ext cx="3524250" cy="1476375"/>
-              <a:chOff x="762000" y="4572000"/>
-              <a:chExt cx="3524250" cy="1476375"/>
-            </a:xfrm>
-          </p:grpSpPr>
-          <p:sp>
-            <p:nvSpPr>
-              <p:cNvPr id="25" name="Rectangle 25"/>
-              <p:cNvSpPr/>
-              <p:nvPr/>
-            </p:nvSpPr>
-            <p:spPr>
-              <a:xfrm>
-                <a:off x="762000" y="4572000"/>
-                <a:ext cx="3524250" cy="1476375"/>
-              </a:xfrm>
-              <a:prstGeom prst="roundRect">
-                <a:avLst>
-                  <a:gd name="adj" fmla="val 5161"/>
-                </a:avLst>
-              </a:prstGeom>
-              <a:solidFill>
-                <a:srgbClr val="F0F7F4"/>
-              </a:solidFill>
-              <a:ln>
-                <a:noFill/>
-              </a:ln>
-            </p:spPr>
-          </p:sp>
-          <p:pic>
-            <p:nvPicPr>
-              <p:cNvPr id="26" name="Image 26"/>
-              <p:cNvPicPr>
-                <a:picLocks noChangeAspect="1"/>
-              </p:cNvPicPr>
-              <p:nvPr/>
-            </p:nvPicPr>
-            <p:blipFill>
-              <a:blip r:embed="rId2"/>
-              <a:stretch>
-                <a:fillRect/>
-              </a:stretch>
-            </p:blipFill>
-            <p:spPr>
-              <a:xfrm>
-                <a:off x="1356023" y="4667250"/>
-                <a:ext cx="2336205" cy="1285875"/>
-              </a:xfrm>
-              <a:prstGeom prst="rect">
-                <a:avLst/>
-              </a:prstGeom>
-            </p:spPr>
-          </p:pic>
-        </p:grpSp>
-        <p:grpSp>
-          <p:nvGrpSpPr>
-            <p:cNvPr id="30" name="Group 30"/>
-            <p:cNvGrpSpPr/>
-            <p:nvPr/>
-          </p:nvGrpSpPr>
-          <p:grpSpPr>
-            <a:xfrm>
-              <a:off x="4429125" y="4572000"/>
-              <a:ext cx="3524250" cy="1476375"/>
-              <a:chOff x="4429125" y="4572000"/>
-              <a:chExt cx="3524250" cy="1476375"/>
-            </a:xfrm>
-          </p:grpSpPr>
-          <p:sp>
-            <p:nvSpPr>
-              <p:cNvPr id="28" name="Rectangle 28"/>
-              <p:cNvSpPr/>
-              <p:nvPr/>
-            </p:nvSpPr>
-            <p:spPr>
-              <a:xfrm>
-                <a:off x="4429125" y="4572000"/>
-                <a:ext cx="3524250" cy="1476375"/>
-              </a:xfrm>
-              <a:prstGeom prst="roundRect">
-                <a:avLst>
-                  <a:gd name="adj" fmla="val 5161"/>
-                </a:avLst>
-              </a:prstGeom>
-              <a:solidFill>
-                <a:srgbClr val="F0F7F4"/>
-              </a:solidFill>
-              <a:ln>
-                <a:noFill/>
-              </a:ln>
-            </p:spPr>
-          </p:sp>
-          <p:pic>
-            <p:nvPicPr>
-              <p:cNvPr id="29" name="Image 29"/>
-              <p:cNvPicPr>
-                <a:picLocks noChangeAspect="1"/>
-              </p:cNvPicPr>
-              <p:nvPr/>
-            </p:nvPicPr>
-            <p:blipFill>
-              <a:blip r:embed="rId3"/>
-              <a:stretch>
-                <a:fillRect/>
-              </a:stretch>
-            </p:blipFill>
-            <p:spPr>
-              <a:xfrm>
-                <a:off x="5023148" y="4667250"/>
-                <a:ext cx="2336205" cy="1285875"/>
-              </a:xfrm>
-              <a:prstGeom prst="rect">
-                <a:avLst/>
-              </a:prstGeom>
-            </p:spPr>
-          </p:pic>
-        </p:grpSp>
-        <p:grpSp>
-          <p:nvGrpSpPr>
-            <p:cNvPr id="33" name="Group 33"/>
-            <p:cNvGrpSpPr/>
-            <p:nvPr/>
-          </p:nvGrpSpPr>
-          <p:grpSpPr>
-            <a:xfrm>
-              <a:off x="8096250" y="4572000"/>
-              <a:ext cx="3333750" cy="1476375"/>
-              <a:chOff x="8096250" y="4572000"/>
-              <a:chExt cx="3333750" cy="1476375"/>
-            </a:xfrm>
-          </p:grpSpPr>
-          <p:sp>
-            <p:nvSpPr>
-              <p:cNvPr id="31" name="Rectangle 31"/>
-              <p:cNvSpPr/>
-              <p:nvPr/>
-            </p:nvSpPr>
-            <p:spPr>
-              <a:xfrm>
-                <a:off x="8096250" y="4572000"/>
-                <a:ext cx="3333750" cy="1476375"/>
-              </a:xfrm>
-              <a:prstGeom prst="roundRect">
-                <a:avLst>
-                  <a:gd name="adj" fmla="val 5161"/>
-                </a:avLst>
-              </a:prstGeom>
-              <a:solidFill>
-                <a:srgbClr val="F0F7F4"/>
-              </a:solidFill>
-              <a:ln>
-                <a:noFill/>
-              </a:ln>
-            </p:spPr>
-          </p:sp>
-          <p:pic>
-            <p:nvPicPr>
-              <p:cNvPr id="32" name="Image 32"/>
-              <p:cNvPicPr>
-                <a:picLocks noChangeAspect="1"/>
-              </p:cNvPicPr>
-              <p:nvPr/>
-            </p:nvPicPr>
-            <p:blipFill>
-              <a:blip r:embed="rId4"/>
-              <a:stretch>
-                <a:fillRect/>
-              </a:stretch>
-            </p:blipFill>
-            <p:spPr>
-              <a:xfrm>
-                <a:off x="8595023" y="4667250"/>
-                <a:ext cx="2336205" cy="1285875"/>
-              </a:xfrm>
-              <a:prstGeom prst="rect">
-                <a:avLst/>
-              </a:prstGeom>
-            </p:spPr>
-          </p:pic>
-        </p:grpSp>
-      </p:grpSp>
-      <p:grpSp>
-        <p:nvGrpSpPr>
           <p:cNvPr id="38" name="Group 38"/>
           <p:cNvGrpSpPr/>
           <p:nvPr/>
@@ -8147,6 +7337,30 @@
           </p:txBody>
         </p:sp>
       </p:grpSp>
+      <p:pic>
+        <p:nvPicPr>
+          <p:cNvPr id="39" name="图片 38"/>
+          <p:cNvPicPr>
+            <a:picLocks noChangeAspect="1"/>
+          </p:cNvPicPr>
+          <p:nvPr/>
+        </p:nvPicPr>
+        <p:blipFill>
+          <a:blip r:embed="rId1"/>
+          <a:stretch>
+            <a:fillRect/>
+          </a:stretch>
+        </p:blipFill>
+        <p:spPr>
+          <a:xfrm>
+            <a:off x="1840865" y="1152525"/>
+            <a:ext cx="9289415" cy="5528945"/>
+          </a:xfrm>
+          <a:prstGeom prst="rect">
+            <a:avLst/>
+          </a:prstGeom>
+        </p:spPr>
+      </p:pic>
     </p:spTree>
   </p:cSld>
   <p:clrMapOvr>
@@ -8167,91 +7381,9 @@
   <p:timing>
     <p:tnLst>
       <p:par>
-        <p:cTn id="1" dur="indefinite" restart="never" nodeType="tmRoot">
-          <p:childTnLst>
-            <p:seq concurrent="1" nextAc="seek">
-              <p:cTn id="2" dur="indefinite" nodeType="mainSeq">
-                <p:childTnLst>
-                  <p:par>
-                    <p:cTn id="3" fill="hold">
-                      <p:stCondLst>
-                        <p:cond delay="indefinite"/>
-                        <p:cond evt="onBegin" delay="0">
-                          <p:tn val="2"/>
-                        </p:cond>
-                      </p:stCondLst>
-                      <p:childTnLst>
-                        <p:par>
-                          <p:cTn id="4" fill="hold">
-                            <p:stCondLst>
-                              <p:cond delay="0"/>
-                            </p:stCondLst>
-                            <p:childTnLst>
-                              <p:par>
-                                <p:cTn id="5" presetID="22" presetClass="entr" presetSubtype="1" fill="hold" nodeType="afterEffect">
-                                  <p:stCondLst>
-                                    <p:cond delay="0"/>
-                                  </p:stCondLst>
-                                  <p:childTnLst>
-                                    <p:set>
-                                      <p:cBhvr>
-                                        <p:cTn id="6" dur="1" fill="hold">
-                                          <p:stCondLst>
-                                            <p:cond delay="0"/>
-                                          </p:stCondLst>
-                                        </p:cTn>
-                                        <p:tgtEl>
-                                          <p:spTgt spid="34"/>
-                                        </p:tgtEl>
-                                        <p:attrNameLst>
-                                          <p:attrName>style.visibility</p:attrName>
-                                        </p:attrNameLst>
-                                      </p:cBhvr>
-                                      <p:to>
-                                        <p:strVal val="visible"/>
-                                      </p:to>
-                                    </p:set>
-                                    <p:animEffect transition="in" filter="wipe(left)">
-                                      <p:cBhvr>
-                                        <p:cTn id="7" dur="400"/>
-                                        <p:tgtEl>
-                                          <p:spTgt spid="34"/>
-                                        </p:tgtEl>
-                                      </p:cBhvr>
-                                    </p:animEffect>
-                                  </p:childTnLst>
-                                </p:cTn>
-                              </p:par>
-                            </p:childTnLst>
-                          </p:cTn>
-                        </p:par>
-                      </p:childTnLst>
-                    </p:cTn>
-                  </p:par>
-                </p:childTnLst>
-              </p:cTn>
-              <p:prevCondLst>
-                <p:cond evt="onPrev" delay="0">
-                  <p:tgtEl>
-                    <p:sldTgt/>
-                  </p:tgtEl>
-                </p:cond>
-              </p:prevCondLst>
-              <p:nextCondLst>
-                <p:cond evt="onNext" delay="0">
-                  <p:tgtEl>
-                    <p:sldTgt/>
-                  </p:tgtEl>
-                </p:cond>
-              </p:nextCondLst>
-            </p:seq>
-          </p:childTnLst>
-        </p:cTn>
+        <p:cTn id="1" dur="indefinite" restart="never" nodeType="tmRoot"/>
       </p:par>
     </p:tnLst>
-    <p:bldLst>
-      <p:bldP spid="34" grpId="0"/>
-    </p:bldLst>
   </p:timing>
 </p:sld>
 </file>
@@ -8458,14 +7590,18 @@
         <p:nvGrpSpPr>
           <p:cNvPr id="35" name="Group 35"/>
           <p:cNvGrpSpPr/>
-          <p:nvPr/>
+          <p:nvPr>
+            <p:custDataLst>
+              <p:tags r:id="rId1"/>
+            </p:custDataLst>
+          </p:nvPr>
         </p:nvGrpSpPr>
         <p:grpSpPr>
           <a:xfrm>
             <a:off x="571500" y="1304276"/>
-            <a:ext cx="11049000" cy="5029849"/>
+            <a:ext cx="11049000" cy="4778764"/>
             <a:chOff x="571500" y="1304276"/>
-            <a:chExt cx="11049000" cy="5029849"/>
+            <a:chExt cx="11049000" cy="4778764"/>
           </a:xfrm>
         </p:grpSpPr>
         <p:grpSp>
@@ -8488,10 +7624,14 @@
               <p:cNvPicPr>
                 <a:picLocks noChangeAspect="1"/>
               </p:cNvPicPr>
-              <p:nvPr/>
+              <p:nvPr>
+                <p:custDataLst>
+                  <p:tags r:id="rId2"/>
+                </p:custDataLst>
+              </p:nvPr>
             </p:nvPicPr>
             <p:blipFill>
-              <a:blip r:embed="rId1"/>
+              <a:blip r:embed="rId3"/>
               <a:stretch>
                 <a:fillRect/>
               </a:stretch>
@@ -8510,7 +7650,11 @@
             <p:nvSpPr>
               <p:cNvPr id="9" name="TextBox 9"/>
               <p:cNvSpPr txBox="1"/>
-              <p:nvPr/>
+              <p:nvPr>
+                <p:custDataLst>
+                  <p:tags r:id="rId4"/>
+                </p:custDataLst>
+              </p:nvPr>
             </p:nvSpPr>
             <p:spPr>
               <a:xfrm>
@@ -8575,10 +7719,14 @@
               <p:cNvPicPr>
                 <a:picLocks noChangeAspect="1"/>
               </p:cNvPicPr>
-              <p:nvPr/>
+              <p:nvPr>
+                <p:custDataLst>
+                  <p:tags r:id="rId5"/>
+                </p:custDataLst>
+              </p:nvPr>
             </p:nvPicPr>
             <p:blipFill>
-              <a:blip r:embed="rId2"/>
+              <a:blip r:embed="rId6"/>
               <a:stretch>
                 <a:fillRect/>
               </a:stretch>
@@ -8597,7 +7745,11 @@
             <p:nvSpPr>
               <p:cNvPr id="12" name="TextBox 12"/>
               <p:cNvSpPr txBox="1"/>
-              <p:nvPr/>
+              <p:nvPr>
+                <p:custDataLst>
+                  <p:tags r:id="rId7"/>
+                </p:custDataLst>
+              </p:nvPr>
             </p:nvSpPr>
             <p:spPr>
               <a:xfrm>
@@ -8662,10 +7814,14 @@
               <p:cNvPicPr>
                 <a:picLocks noChangeAspect="1"/>
               </p:cNvPicPr>
-              <p:nvPr/>
+              <p:nvPr>
+                <p:custDataLst>
+                  <p:tags r:id="rId8"/>
+                </p:custDataLst>
+              </p:nvPr>
             </p:nvPicPr>
             <p:blipFill>
-              <a:blip r:embed="rId3"/>
+              <a:blip r:embed="rId9"/>
               <a:stretch>
                 <a:fillRect/>
               </a:stretch>
@@ -8684,7 +7840,11 @@
             <p:nvSpPr>
               <p:cNvPr id="15" name="TextBox 15"/>
               <p:cNvSpPr txBox="1"/>
-              <p:nvPr/>
+              <p:nvPr>
+                <p:custDataLst>
+                  <p:tags r:id="rId10"/>
+                </p:custDataLst>
+              </p:nvPr>
             </p:nvSpPr>
             <p:spPr>
               <a:xfrm>
@@ -8729,30 +7889,6 @@
             </p:txBody>
           </p:sp>
         </p:grpSp>
-        <p:pic>
-          <p:nvPicPr>
-            <p:cNvPr id="17" name="Image 17"/>
-            <p:cNvPicPr>
-              <a:picLocks noChangeAspect="1"/>
-            </p:cNvPicPr>
-            <p:nvPr/>
-          </p:nvPicPr>
-          <p:blipFill>
-            <a:blip r:embed="rId4"/>
-            <a:stretch>
-              <a:fillRect/>
-            </a:stretch>
-          </p:blipFill>
-          <p:spPr>
-            <a:xfrm>
-              <a:off x="6715125" y="1304276"/>
-              <a:ext cx="1238250" cy="2677824"/>
-            </a:xfrm>
-            <a:prstGeom prst="rect">
-              <a:avLst/>
-            </a:prstGeom>
-          </p:spPr>
-        </p:pic>
         <p:grpSp>
           <p:nvGrpSpPr>
             <p:cNvPr id="22" name="Group 22"/>
@@ -8761,10 +7897,10 @@
           </p:nvGrpSpPr>
           <p:grpSpPr>
             <a:xfrm>
-              <a:off x="8763000" y="1304276"/>
-              <a:ext cx="1238250" cy="3012930"/>
-              <a:chOff x="8763000" y="1304276"/>
-              <a:chExt cx="1238250" cy="3012930"/>
+              <a:off x="6715125" y="1320151"/>
+              <a:ext cx="1238250" cy="2958320"/>
+              <a:chOff x="6715125" y="1320151"/>
+              <a:chExt cx="1238250" cy="2958320"/>
             </a:xfrm>
           </p:grpSpPr>
           <p:pic>
@@ -8773,17 +7909,21 @@
               <p:cNvPicPr>
                 <a:picLocks noChangeAspect="1"/>
               </p:cNvPicPr>
-              <p:nvPr/>
+              <p:nvPr>
+                <p:custDataLst>
+                  <p:tags r:id="rId11"/>
+                </p:custDataLst>
+              </p:nvPr>
             </p:nvPicPr>
             <p:blipFill>
-              <a:blip r:embed="rId5"/>
+              <a:blip r:embed="rId12"/>
               <a:stretch>
                 <a:fillRect/>
               </a:stretch>
             </p:blipFill>
             <p:spPr>
               <a:xfrm>
-                <a:off x="8763000" y="1304276"/>
+                <a:off x="6715125" y="1320151"/>
                 <a:ext cx="1238250" cy="2677824"/>
               </a:xfrm>
               <a:prstGeom prst="rect">
@@ -8795,11 +7935,15 @@
             <p:nvSpPr>
               <p:cNvPr id="21" name="TextBox 21"/>
               <p:cNvSpPr txBox="1"/>
-              <p:nvPr/>
-            </p:nvSpPr>
-            <p:spPr>
-              <a:xfrm>
-                <a:off x="9151620" y="4149566"/>
+              <p:nvPr>
+                <p:custDataLst>
+                  <p:tags r:id="rId13"/>
+                </p:custDataLst>
+              </p:nvPr>
+            </p:nvSpPr>
+            <p:spPr>
+              <a:xfrm>
+                <a:off x="7103745" y="4110831"/>
                 <a:ext cx="461010" cy="167640"/>
               </a:xfrm>
               <a:prstGeom prst="rect">
@@ -8848,8 +7992,8 @@
           </p:nvGrpSpPr>
           <p:grpSpPr>
             <a:xfrm>
-              <a:off x="7239000" y="3762375"/>
-              <a:ext cx="4381500" cy="2571750"/>
+              <a:off x="7239000" y="4391400"/>
+              <a:ext cx="4381500" cy="1691640"/>
               <a:chOff x="7239000" y="3762375"/>
               <a:chExt cx="4381500" cy="2571750"/>
             </a:xfrm>
@@ -10706,7 +9850,7 @@
             <p:spPr>
               <a:xfrm>
                 <a:off x="3986212" y="1307306"/>
-                <a:ext cx="1658904" cy="228600"/>
+                <a:ext cx="614045" cy="173355"/>
               </a:xfrm>
               <a:prstGeom prst="rect">
                 <a:avLst/>
@@ -10732,7 +9876,7 @@
                     <a:ea typeface="微软雅黑" panose="020B0503020204020204" charset="-122"/>
                     <a:cs typeface="Arial" panose="020B0604020202020204"/>
                   </a:rPr>
-                  <a:t>Element Plus 管理界面</a:t>
+                  <a:t> 管理界面</a:t>
                 </a:r>
                 <a:endParaRPr lang="zh-CN" sz="1125" b="1" dirty="0">
                   <a:solidFill>
@@ -10769,30 +9913,6 @@
               </a:ln>
             </p:spPr>
           </p:sp>
-          <p:pic>
-            <p:nvPicPr>
-              <p:cNvPr id="33" name="Image 33"/>
-              <p:cNvPicPr>
-                <a:picLocks noChangeAspect="1"/>
-              </p:cNvPicPr>
-              <p:nvPr/>
-            </p:nvPicPr>
-            <p:blipFill>
-              <a:blip r:embed="rId1"/>
-              <a:stretch>
-                <a:fillRect/>
-              </a:stretch>
-            </p:blipFill>
-            <p:spPr>
-              <a:xfrm>
-                <a:off x="4143375" y="1719750"/>
-                <a:ext cx="7143750" cy="4466250"/>
-              </a:xfrm>
-              <a:prstGeom prst="rect">
-                <a:avLst/>
-              </a:prstGeom>
-            </p:spPr>
-          </p:pic>
         </p:grpSp>
       </p:grpSp>
       <p:grpSp>
@@ -10942,6 +10062,102 @@
           </p:txBody>
         </p:sp>
       </p:grpSp>
+      <p:pic>
+        <p:nvPicPr>
+          <p:cNvPr id="41" name="Image 9"/>
+          <p:cNvPicPr>
+            <a:picLocks noChangeAspect="1"/>
+          </p:cNvPicPr>
+          <p:nvPr/>
+        </p:nvPicPr>
+        <p:blipFill>
+          <a:blip r:embed="rId1"/>
+          <a:stretch>
+            <a:fillRect/>
+          </a:stretch>
+        </p:blipFill>
+        <p:spPr>
+          <a:xfrm>
+            <a:off x="4154170" y="1674495"/>
+            <a:ext cx="3579495" cy="2256155"/>
+          </a:xfrm>
+          <a:prstGeom prst="rect">
+            <a:avLst/>
+          </a:prstGeom>
+        </p:spPr>
+      </p:pic>
+      <p:pic>
+        <p:nvPicPr>
+          <p:cNvPr id="44" name="Image 26"/>
+          <p:cNvPicPr>
+            <a:picLocks noChangeAspect="1"/>
+          </p:cNvPicPr>
+          <p:nvPr/>
+        </p:nvPicPr>
+        <p:blipFill>
+          <a:blip r:embed="rId2"/>
+          <a:stretch>
+            <a:fillRect/>
+          </a:stretch>
+        </p:blipFill>
+        <p:spPr>
+          <a:xfrm>
+            <a:off x="7868920" y="1674495"/>
+            <a:ext cx="3560445" cy="2256155"/>
+          </a:xfrm>
+          <a:prstGeom prst="rect">
+            <a:avLst/>
+          </a:prstGeom>
+        </p:spPr>
+      </p:pic>
+      <p:pic>
+        <p:nvPicPr>
+          <p:cNvPr id="45" name="Image 29"/>
+          <p:cNvPicPr>
+            <a:picLocks noChangeAspect="1"/>
+          </p:cNvPicPr>
+          <p:nvPr/>
+        </p:nvPicPr>
+        <p:blipFill>
+          <a:blip r:embed="rId3"/>
+          <a:stretch>
+            <a:fillRect/>
+          </a:stretch>
+        </p:blipFill>
+        <p:spPr>
+          <a:xfrm>
+            <a:off x="4149725" y="4269740"/>
+            <a:ext cx="3583940" cy="1972945"/>
+          </a:xfrm>
+          <a:prstGeom prst="rect">
+            <a:avLst/>
+          </a:prstGeom>
+        </p:spPr>
+      </p:pic>
+      <p:pic>
+        <p:nvPicPr>
+          <p:cNvPr id="46" name="Image 32"/>
+          <p:cNvPicPr>
+            <a:picLocks noChangeAspect="1"/>
+          </p:cNvPicPr>
+          <p:nvPr/>
+        </p:nvPicPr>
+        <p:blipFill>
+          <a:blip r:embed="rId4"/>
+          <a:stretch>
+            <a:fillRect/>
+          </a:stretch>
+        </p:blipFill>
+        <p:spPr>
+          <a:xfrm>
+            <a:off x="7863205" y="4269740"/>
+            <a:ext cx="3554730" cy="1998980"/>
+          </a:xfrm>
+          <a:prstGeom prst="rect">
+            <a:avLst/>
+          </a:prstGeom>
+        </p:spPr>
+      </p:pic>
     </p:spTree>
   </p:cSld>
   <p:clrMapOvr>
@@ -14634,10 +13850,10 @@
         </p:nvGrpSpPr>
         <p:grpSpPr>
           <a:xfrm>
-            <a:off x="744855" y="1238250"/>
-            <a:ext cx="10685145" cy="4143375"/>
-            <a:chOff x="744855" y="1238250"/>
-            <a:chExt cx="10685145" cy="4143375"/>
+            <a:off x="762000" y="1238250"/>
+            <a:ext cx="10668000" cy="4143375"/>
+            <a:chOff x="762000" y="1238250"/>
+            <a:chExt cx="10668000" cy="4143375"/>
           </a:xfrm>
         </p:grpSpPr>
         <p:grpSp>
@@ -14648,60 +13864,12 @@
           </p:nvGrpSpPr>
           <p:grpSpPr>
             <a:xfrm>
-              <a:off x="744855" y="1238250"/>
-              <a:ext cx="5065395" cy="4143375"/>
-              <a:chOff x="744855" y="1238250"/>
-              <a:chExt cx="5065395" cy="4143375"/>
+              <a:off x="762000" y="1238250"/>
+              <a:ext cx="5048250" cy="4143375"/>
+              <a:chOff x="762000" y="1238250"/>
+              <a:chExt cx="5048250" cy="4143375"/>
             </a:xfrm>
           </p:grpSpPr>
-          <p:sp>
-            <p:nvSpPr>
-              <p:cNvPr id="8" name="TextBox 8"/>
-              <p:cNvSpPr txBox="1"/>
-              <p:nvPr/>
-            </p:nvSpPr>
-            <p:spPr>
-              <a:xfrm>
-                <a:off x="744855" y="1283018"/>
-                <a:ext cx="790384" cy="274320"/>
-              </a:xfrm>
-              <a:prstGeom prst="rect">
-                <a:avLst/>
-              </a:prstGeom>
-              <a:noFill/>
-              <a:ln>
-                <a:noFill/>
-              </a:ln>
-            </p:spPr>
-            <p:txBody>
-              <a:bodyPr wrap="none" lIns="0" tIns="0" rIns="0" bIns="0" anchor="t" anchorCtr="0">
-                <a:spAutoFit/>
-              </a:bodyPr>
-              <a:lstStyle/>
-              <a:p>
-                <a:pPr algn="l"/>
-                <a:r>
-                  <a:rPr lang="zh-CN" sz="1350" b="1" dirty="0">
-                    <a:solidFill>
-                      <a:srgbClr val="00897B"/>
-                    </a:solidFill>
-                    <a:latin typeface="Arial" panose="020B0604020202020204"/>
-                    <a:ea typeface="微软雅黑" panose="020B0503020204020204" charset="-122"/>
-                    <a:cs typeface="Arial" panose="020B0604020202020204"/>
-                  </a:rPr>
-                  <a:t>管理后台</a:t>
-                </a:r>
-                <a:endParaRPr lang="zh-CN" sz="1350" b="1" dirty="0">
-                  <a:solidFill>
-                    <a:srgbClr val="00897B"/>
-                  </a:solidFill>
-                  <a:latin typeface="Arial" panose="020B0604020202020204"/>
-                  <a:ea typeface="微软雅黑" panose="020B0503020204020204" charset="-122"/>
-                  <a:cs typeface="Arial" panose="020B0604020202020204"/>
-                </a:endParaRPr>
-              </a:p>
-            </p:txBody>
-          </p:sp>
           <p:sp>
             <p:nvSpPr>
               <p:cNvPr id="9" name="Rectangle 9"/>
@@ -15779,31 +14947,16 @@
               </a:p>
             </p:txBody>
           </p:sp>
-        </p:grpSp>
-        <p:grpSp>
-          <p:nvGrpSpPr>
-            <p:cNvPr id="51" name="Group 51"/>
-            <p:cNvGrpSpPr/>
-            <p:nvPr/>
-          </p:nvGrpSpPr>
-          <p:grpSpPr>
-            <a:xfrm>
-              <a:off x="6269355" y="1238250"/>
-              <a:ext cx="5160645" cy="4143375"/>
-              <a:chOff x="6269355" y="1238250"/>
-              <a:chExt cx="5160645" cy="4143375"/>
-            </a:xfrm>
-          </p:grpSpPr>
-          <p:sp>
-            <p:nvSpPr>
-              <p:cNvPr id="34" name="TextBox 34"/>
+          <p:sp>
+            <p:nvSpPr>
+              <p:cNvPr id="8" name="TextBox 8"/>
               <p:cNvSpPr txBox="1"/>
               <p:nvPr/>
             </p:nvSpPr>
             <p:spPr>
               <a:xfrm>
-                <a:off x="6269355" y="1283018"/>
-                <a:ext cx="865994" cy="274320"/>
+                <a:off x="925830" y="1329373"/>
+                <a:ext cx="790384" cy="274320"/>
               </a:xfrm>
               <a:prstGeom prst="rect">
                 <a:avLst/>
@@ -15823,17 +14976,17 @@
                 <a:r>
                   <a:rPr lang="zh-CN" sz="1350" b="1" dirty="0">
                     <a:solidFill>
-                      <a:srgbClr val="00897B"/>
+                      <a:schemeClr val="tx1"/>
                     </a:solidFill>
                     <a:latin typeface="Arial" panose="020B0604020202020204"/>
                     <a:ea typeface="微软雅黑" panose="020B0503020204020204" charset="-122"/>
                     <a:cs typeface="Arial" panose="020B0604020202020204"/>
                   </a:rPr>
-                  <a:t>租客端 H5</a:t>
+                  <a:t>管理后台</a:t>
                 </a:r>
                 <a:endParaRPr lang="zh-CN" sz="1350" b="1" dirty="0">
                   <a:solidFill>
-                    <a:srgbClr val="00897B"/>
+                    <a:schemeClr val="tx1"/>
                   </a:solidFill>
                   <a:latin typeface="Arial" panose="020B0604020202020204"/>
                   <a:ea typeface="微软雅黑" panose="020B0503020204020204" charset="-122"/>
@@ -15842,6 +14995,21 @@
               </a:p>
             </p:txBody>
           </p:sp>
+        </p:grpSp>
+        <p:grpSp>
+          <p:nvGrpSpPr>
+            <p:cNvPr id="51" name="Group 51"/>
+            <p:cNvGrpSpPr/>
+            <p:nvPr/>
+          </p:nvGrpSpPr>
+          <p:grpSpPr>
+            <a:xfrm>
+              <a:off x="6286500" y="1238250"/>
+              <a:ext cx="5143500" cy="4143375"/>
+              <a:chOff x="6286500" y="1238250"/>
+              <a:chExt cx="5143500" cy="4143375"/>
+            </a:xfrm>
+          </p:grpSpPr>
           <p:sp>
             <p:nvSpPr>
               <p:cNvPr id="35" name="Rectangle 35"/>
@@ -15867,6 +15035,12 @@
                 </a:solidFill>
               </a:ln>
             </p:spPr>
+            <p:txBody>
+              <a:bodyPr/>
+              <a:p>
+                <a:endParaRPr lang="zh-CN" altLang="en-US"/>
+              </a:p>
+            </p:txBody>
           </p:sp>
           <p:sp>
             <p:nvSpPr>
@@ -16614,6 +15788,54 @@
                 <a:endParaRPr lang="zh-CN" sz="900" dirty="0">
                   <a:solidFill>
                     <a:srgbClr val="6B7280"/>
+                  </a:solidFill>
+                  <a:latin typeface="Arial" panose="020B0604020202020204"/>
+                  <a:ea typeface="微软雅黑" panose="020B0503020204020204" charset="-122"/>
+                  <a:cs typeface="Arial" panose="020B0604020202020204"/>
+                </a:endParaRPr>
+              </a:p>
+            </p:txBody>
+          </p:sp>
+          <p:sp>
+            <p:nvSpPr>
+              <p:cNvPr id="34" name="TextBox 34"/>
+              <p:cNvSpPr txBox="1"/>
+              <p:nvPr/>
+            </p:nvSpPr>
+            <p:spPr>
+              <a:xfrm>
+                <a:off x="6491605" y="1329373"/>
+                <a:ext cx="865994" cy="274320"/>
+              </a:xfrm>
+              <a:prstGeom prst="rect">
+                <a:avLst/>
+              </a:prstGeom>
+              <a:noFill/>
+              <a:ln>
+                <a:noFill/>
+              </a:ln>
+            </p:spPr>
+            <p:txBody>
+              <a:bodyPr wrap="none" lIns="0" tIns="0" rIns="0" bIns="0" anchor="t" anchorCtr="0">
+                <a:spAutoFit/>
+              </a:bodyPr>
+              <a:lstStyle/>
+              <a:p>
+                <a:pPr algn="l"/>
+                <a:r>
+                  <a:rPr lang="zh-CN" sz="1350" b="1" dirty="0">
+                    <a:solidFill>
+                      <a:schemeClr val="tx1"/>
+                    </a:solidFill>
+                    <a:latin typeface="Arial" panose="020B0604020202020204"/>
+                    <a:ea typeface="微软雅黑" panose="020B0503020204020204" charset="-122"/>
+                    <a:cs typeface="Arial" panose="020B0604020202020204"/>
+                  </a:rPr>
+                  <a:t>租客端 H5</a:t>
+                </a:r>
+                <a:endParaRPr lang="zh-CN" sz="1350" b="1" dirty="0">
+                  <a:solidFill>
+                    <a:schemeClr val="tx1"/>
                   </a:solidFill>
                   <a:latin typeface="Arial" panose="020B0604020202020204"/>
                   <a:ea typeface="微软雅黑" panose="020B0503020204020204" charset="-122"/>
@@ -29683,7 +28905,7 @@
             </p:nvSpPr>
             <p:spPr>
               <a:xfrm>
-                <a:off x="1047750" y="4191000"/>
+                <a:off x="1035685" y="4364990"/>
                 <a:ext cx="2857500" cy="285750"/>
               </a:xfrm>
               <a:prstGeom prst="roundRect">
@@ -29707,7 +28929,7 @@
             </p:nvSpPr>
             <p:spPr>
               <a:xfrm>
-                <a:off x="2327600" y="4276249"/>
+                <a:off x="2326965" y="4452779"/>
                 <a:ext cx="297799" cy="198120"/>
               </a:xfrm>
               <a:prstGeom prst="rect">
@@ -30380,7 +29602,7 @@
             </p:nvSpPr>
             <p:spPr>
               <a:xfrm>
-                <a:off x="4667250" y="4191000"/>
+                <a:off x="4667250" y="4364990"/>
                 <a:ext cx="2857500" cy="285750"/>
               </a:xfrm>
               <a:prstGeom prst="roundRect">
@@ -30404,7 +29626,7 @@
             </p:nvSpPr>
             <p:spPr>
               <a:xfrm>
-                <a:off x="5947100" y="4276249"/>
+                <a:off x="5924240" y="4452779"/>
                 <a:ext cx="297799" cy="198120"/>
               </a:xfrm>
               <a:prstGeom prst="rect">
@@ -31354,7 +30576,7 @@
             </p:nvSpPr>
             <p:spPr>
               <a:xfrm>
-                <a:off x="8286750" y="4191000"/>
+                <a:off x="8275320" y="4364990"/>
                 <a:ext cx="2857500" cy="285750"/>
               </a:xfrm>
               <a:prstGeom prst="roundRect">
@@ -31369,6 +30591,12 @@
                 <a:noFill/>
               </a:ln>
             </p:spPr>
+            <p:txBody>
+              <a:bodyPr/>
+              <a:p>
+                <a:endParaRPr lang="zh-CN" altLang="en-US"/>
+              </a:p>
+            </p:txBody>
           </p:sp>
           <p:sp>
             <p:nvSpPr>
@@ -31378,7 +30606,7 @@
             </p:nvSpPr>
             <p:spPr>
               <a:xfrm>
-                <a:off x="9566600" y="4276249"/>
+                <a:off x="9565965" y="4452779"/>
                 <a:ext cx="297799" cy="198120"/>
               </a:xfrm>
               <a:prstGeom prst="rect">
@@ -39627,6 +38855,60 @@
     </p:bldLst>
   </p:timing>
 </p:sld>
+</file>
+
+<file path=ppt/tags/tag1.xml><?xml version="1.0" encoding="utf-8"?>
+<p:tagLst xmlns:p="http://schemas.openxmlformats.org/presentationml/2006/main">
+  <p:tag name="KSO_WM_DIAGRAM_VIRTUALLY_FRAME" val="{&quot;height&quot;:376.2806299212598,&quot;left&quot;:45,&quot;top&quot;:102.69889763779527,&quot;width&quot;:870}"/>
+</p:tagLst>
+</file>
+
+<file path=ppt/tags/tag2.xml><?xml version="1.0" encoding="utf-8"?>
+<p:tagLst xmlns:p="http://schemas.openxmlformats.org/presentationml/2006/main">
+  <p:tag name="KSO_WM_DIAGRAM_VIRTUALLY_FRAME" val="{&quot;height&quot;:376.2806299212598,&quot;left&quot;:45,&quot;top&quot;:102.69889763779527,&quot;width&quot;:870}"/>
+</p:tagLst>
+</file>
+
+<file path=ppt/tags/tag3.xml><?xml version="1.0" encoding="utf-8"?>
+<p:tagLst xmlns:p="http://schemas.openxmlformats.org/presentationml/2006/main">
+  <p:tag name="KSO_WM_DIAGRAM_VIRTUALLY_FRAME" val="{&quot;height&quot;:376.2806299212598,&quot;left&quot;:45,&quot;top&quot;:102.69889763779527,&quot;width&quot;:870}"/>
+</p:tagLst>
+</file>
+
+<file path=ppt/tags/tag4.xml><?xml version="1.0" encoding="utf-8"?>
+<p:tagLst xmlns:p="http://schemas.openxmlformats.org/presentationml/2006/main">
+  <p:tag name="KSO_WM_DIAGRAM_VIRTUALLY_FRAME" val="{&quot;height&quot;:376.2806299212598,&quot;left&quot;:45,&quot;top&quot;:102.69889763779527,&quot;width&quot;:870}"/>
+</p:tagLst>
+</file>
+
+<file path=ppt/tags/tag5.xml><?xml version="1.0" encoding="utf-8"?>
+<p:tagLst xmlns:p="http://schemas.openxmlformats.org/presentationml/2006/main">
+  <p:tag name="KSO_WM_DIAGRAM_VIRTUALLY_FRAME" val="{&quot;height&quot;:376.2806299212598,&quot;left&quot;:45,&quot;top&quot;:102.69889763779527,&quot;width&quot;:870}"/>
+</p:tagLst>
+</file>
+
+<file path=ppt/tags/tag6.xml><?xml version="1.0" encoding="utf-8"?>
+<p:tagLst xmlns:p="http://schemas.openxmlformats.org/presentationml/2006/main">
+  <p:tag name="KSO_WM_DIAGRAM_VIRTUALLY_FRAME" val="{&quot;height&quot;:376.2806299212598,&quot;left&quot;:45,&quot;top&quot;:102.69889763779527,&quot;width&quot;:870}"/>
+</p:tagLst>
+</file>
+
+<file path=ppt/tags/tag7.xml><?xml version="1.0" encoding="utf-8"?>
+<p:tagLst xmlns:p="http://schemas.openxmlformats.org/presentationml/2006/main">
+  <p:tag name="KSO_WM_DIAGRAM_VIRTUALLY_FRAME" val="{&quot;height&quot;:376.2806299212598,&quot;left&quot;:45,&quot;top&quot;:102.69889763779527,&quot;width&quot;:870}"/>
+</p:tagLst>
+</file>
+
+<file path=ppt/tags/tag8.xml><?xml version="1.0" encoding="utf-8"?>
+<p:tagLst xmlns:p="http://schemas.openxmlformats.org/presentationml/2006/main">
+  <p:tag name="KSO_WM_DIAGRAM_VIRTUALLY_FRAME" val="{&quot;height&quot;:376.2806299212598,&quot;left&quot;:45,&quot;top&quot;:102.69889763779527,&quot;width&quot;:870}"/>
+</p:tagLst>
+</file>
+
+<file path=ppt/tags/tag9.xml><?xml version="1.0" encoding="utf-8"?>
+<p:tagLst xmlns:p="http://schemas.openxmlformats.org/presentationml/2006/main">
+  <p:tag name="KSO_WM_DIAGRAM_VIRTUALLY_FRAME" val="{&quot;height&quot;:376.2806299212598,&quot;left&quot;:45,&quot;top&quot;:102.69889763779527,&quot;width&quot;:870}"/>
+</p:tagLst>
 </file>
 
 <file path=ppt/theme/theme1.xml><?xml version="1.0" encoding="utf-8"?>
